--- a/classes/parte-2-criptografia-aplicada/058-generacion-de-aleatoriedad-segura-csprng/clase-058-presentacion.pptx
+++ b/classes/parte-2-criptografia-aplicada/058-generacion-de-aleatoriedad-segura-csprng/clase-058-presentacion.pptx
@@ -17,6 +17,9 @@
     <p:sldId id="265" r:id="rId16"/>
     <p:sldId id="266" r:id="rId17"/>
     <p:sldId id="267" r:id="rId18"/>
+    <p:sldId id="268" r:id="rId19"/>
+    <p:sldId id="269" r:id="rId20"/>
+    <p:sldId id="270" r:id="rId21"/>
   </p:sldIdLst>
   <p:sldSz cx="9144000" cy="6858000" type="screen4x3"/>
   <p:notesSz cx="6858000" cy="9144000"/>
@@ -3198,7 +3201,7 @@
                   <a:srgbClr val="0B3D2E"/>
                 </a:solidFill>
               </a:rPr>
-              <a:t>⚠️ Errores comunes</a:t>
+              <a:t>✍️ Ejercicios</a:t>
             </a:r>
           </a:p>
         </p:txBody>
@@ -3236,67 +3239,82 @@
                   <a:srgbClr val="22282E"/>
                 </a:solidFill>
               </a:rPr>
-              <a:t>•  Claves reproducibles — Semilla predecible; usa os.urandom/secrets</a:t>
-            </a:r>
-          </a:p>
-          <a:p>
-            <a:pPr>
-              <a:spcAft>
-                <a:spcPts val="600"/>
-              </a:spcAft>
-            </a:pPr>
-            <a:r>
-              <a:rPr sz="1500">
-                <a:solidFill>
-                  <a:srgbClr val="22282E"/>
-                </a:solidFill>
-              </a:rPr>
-              <a:t>•  Uso de random/rand() para claves — No es CSPRNG; sustitúyelo</a:t>
-            </a:r>
-          </a:p>
-          <a:p>
-            <a:pPr>
-              <a:spcAft>
-                <a:spcPts val="600"/>
-              </a:spcAft>
-            </a:pPr>
-            <a:r>
-              <a:rPr sz="1500">
-                <a:solidFill>
-                  <a:srgbClr val="22282E"/>
-                </a:solidFill>
-              </a:rPr>
-              <a:t>•  Nonces repetidos — Generación insegura; usa CSPRNG o contador único</a:t>
-            </a:r>
-          </a:p>
-          <a:p>
-            <a:pPr>
-              <a:spcAft>
-                <a:spcPts val="600"/>
-              </a:spcAft>
-            </a:pPr>
-            <a:r>
-              <a:rPr sz="1500">
-                <a:solidFill>
-                  <a:srgbClr val="22282E"/>
-                </a:solidFill>
-              </a:rPr>
-              <a:t>•  Baja entropía en arranque — Bloquea hasta sembrar (getrandom) o añade fuente de hardware</a:t>
-            </a:r>
-          </a:p>
-          <a:p>
-            <a:pPr>
-              <a:spcAft>
-                <a:spcPts val="600"/>
-              </a:spcAft>
-            </a:pPr>
-            <a:r>
-              <a:rPr sz="1500">
-                <a:solidFill>
-                  <a:srgbClr val="22282E"/>
-                </a:solidFill>
-              </a:rPr>
-              <a:t>•  Reutilizar tokens de sesión — Genera uno nuevo por sesión con suficiente longitud</a:t>
+              <a:t>•  Explica la diferencia entre random y secrets en Python.</a:t>
+            </a:r>
+          </a:p>
+          <a:p>
+            <a:pPr>
+              <a:spcAft>
+                <a:spcPts val="600"/>
+              </a:spcAft>
+            </a:pPr>
+            <a:r>
+              <a:rPr sz="1500">
+                <a:solidFill>
+                  <a:srgbClr val="22282E"/>
+                </a:solidFill>
+              </a:rPr>
+              <a:t>•  Genera un token de recuperación de 256 bits y razona su espacio.</a:t>
+            </a:r>
+          </a:p>
+          <a:p>
+            <a:pPr>
+              <a:spcAft>
+                <a:spcPts val="600"/>
+              </a:spcAft>
+            </a:pPr>
+            <a:r>
+              <a:rPr sz="1500">
+                <a:solidFill>
+                  <a:srgbClr val="22282E"/>
+                </a:solidFill>
+              </a:rPr>
+              <a:t>•  Investiga el incidente de claves RSA con primos compartidos (factorización por MCD).</a:t>
+            </a:r>
+          </a:p>
+          <a:p>
+            <a:pPr>
+              <a:spcAft>
+                <a:spcPts val="600"/>
+              </a:spcAft>
+            </a:pPr>
+            <a:r>
+              <a:rPr sz="1500">
+                <a:solidFill>
+                  <a:srgbClr val="22282E"/>
+                </a:solidFill>
+              </a:rPr>
+              <a:t>•  Describe cómo el kernel recolecta entropía en el arranque.</a:t>
+            </a:r>
+          </a:p>
+          <a:p>
+            <a:pPr>
+              <a:spcAft>
+                <a:spcPts val="600"/>
+              </a:spcAft>
+            </a:pPr>
+            <a:r>
+              <a:rPr sz="1500">
+                <a:solidFill>
+                  <a:srgbClr val="22282E"/>
+                </a:solidFill>
+              </a:rPr>
+              <a:t>•  Demuestra que sembrar con time() produce salidas predecibles.</a:t>
+            </a:r>
+          </a:p>
+          <a:p>
+            <a:pPr>
+              <a:spcAft>
+                <a:spcPts val="600"/>
+              </a:spcAft>
+            </a:pPr>
+            <a:r>
+              <a:rPr sz="1500">
+                <a:solidFill>
+                  <a:srgbClr val="22282E"/>
+                </a:solidFill>
+              </a:rPr>
+              <a:t>•  Corre una prueba estadística sobre dos fuentes y compara resultados.</a:t>
             </a:r>
           </a:p>
         </p:txBody>
@@ -3347,7 +3365,7 @@
                   <a:srgbClr val="0B3D2E"/>
                 </a:solidFill>
               </a:rPr>
-              <a:t>❓ Preguntas frecuentes</a:t>
+              <a:t>📝 Reto verificable</a:t>
             </a:r>
           </a:p>
         </p:txBody>
@@ -3385,82 +3403,7 @@
                   <a:srgbClr val="22282E"/>
                 </a:solidFill>
               </a:rPr>
-              <a:t>•  ❓ ¿/dev/urandom o /dev/random?</a:t>
-            </a:r>
-          </a:p>
-          <a:p>
-            <a:pPr>
-              <a:spcAft>
-                <a:spcPts val="600"/>
-              </a:spcAft>
-            </a:pPr>
-            <a:r>
-              <a:rPr sz="1500">
-                <a:solidFill>
-                  <a:srgbClr val="22282E"/>
-                </a:solidFill>
-              </a:rPr>
-              <a:t>•  En Linux moderno, urandom/getrandom() es la elección correcta una vez sembrado; random puede bloquear innecesariamente.</a:t>
-            </a:r>
-          </a:p>
-          <a:p>
-            <a:pPr>
-              <a:spcAft>
-                <a:spcPts val="600"/>
-              </a:spcAft>
-            </a:pPr>
-            <a:r>
-              <a:rPr sz="1500">
-                <a:solidFill>
-                  <a:srgbClr val="22282E"/>
-                </a:solidFill>
-              </a:rPr>
-              <a:t>•  ❓ ¿Cuántos bits necesito para un token?</a:t>
-            </a:r>
-          </a:p>
-          <a:p>
-            <a:pPr>
-              <a:spcAft>
-                <a:spcPts val="600"/>
-              </a:spcAft>
-            </a:pPr>
-            <a:r>
-              <a:rPr sz="1500">
-                <a:solidFill>
-                  <a:srgbClr val="22282E"/>
-                </a:solidFill>
-              </a:rPr>
-              <a:t>•  Al menos 128 bits (16 bytes) de aleatoriedad real; 256 bits para márgenes amplios.</a:t>
-            </a:r>
-          </a:p>
-          <a:p>
-            <a:pPr>
-              <a:spcAft>
-                <a:spcPts val="600"/>
-              </a:spcAft>
-            </a:pPr>
-            <a:r>
-              <a:rPr sz="1500">
-                <a:solidFill>
-                  <a:srgbClr val="22282E"/>
-                </a:solidFill>
-              </a:rPr>
-              <a:t>•  ❓ ¿Por qué la mala aleatoriedad es tan peligrosa?</a:t>
-            </a:r>
-          </a:p>
-          <a:p>
-            <a:pPr>
-              <a:spcAft>
-                <a:spcPts val="600"/>
-              </a:spcAft>
-            </a:pPr>
-            <a:r>
-              <a:rPr sz="1500">
-                <a:solidFill>
-                  <a:srgbClr val="22282E"/>
-                </a:solidFill>
-              </a:rPr>
-              <a:t>•  Porque compromete claves y nonces de golpe; un CSPRNG débil hace inútil el mejor algoritmo.</a:t>
+              <a:t>•  Escribe una utilidad que genere claves, nonces y tokens exclusivamente con un CSPRNG, y un test que verifique ausencia de repeticiones en una gran muestra de nonces y una distribución de bits cercana…</a:t>
             </a:r>
           </a:p>
         </p:txBody>
@@ -3511,7 +3454,7 @@
                   <a:srgbClr val="0B3D2E"/>
                 </a:solidFill>
               </a:rPr>
-              <a:t>🔗 Referencias</a:t>
+              <a:t>⚠️ Errores comunes</a:t>
             </a:r>
           </a:p>
         </p:txBody>
@@ -3549,6 +3492,319 @@
                   <a:srgbClr val="22282E"/>
                 </a:solidFill>
               </a:rPr>
+              <a:t>•  Claves reproducibles — Semilla predecible; usa os.urandom/secrets</a:t>
+            </a:r>
+          </a:p>
+          <a:p>
+            <a:pPr>
+              <a:spcAft>
+                <a:spcPts val="600"/>
+              </a:spcAft>
+            </a:pPr>
+            <a:r>
+              <a:rPr sz="1500">
+                <a:solidFill>
+                  <a:srgbClr val="22282E"/>
+                </a:solidFill>
+              </a:rPr>
+              <a:t>•  Uso de random/rand() para claves — No es CSPRNG; sustitúyelo</a:t>
+            </a:r>
+          </a:p>
+          <a:p>
+            <a:pPr>
+              <a:spcAft>
+                <a:spcPts val="600"/>
+              </a:spcAft>
+            </a:pPr>
+            <a:r>
+              <a:rPr sz="1500">
+                <a:solidFill>
+                  <a:srgbClr val="22282E"/>
+                </a:solidFill>
+              </a:rPr>
+              <a:t>•  Nonces repetidos — Generación insegura; usa CSPRNG o contador único</a:t>
+            </a:r>
+          </a:p>
+          <a:p>
+            <a:pPr>
+              <a:spcAft>
+                <a:spcPts val="600"/>
+              </a:spcAft>
+            </a:pPr>
+            <a:r>
+              <a:rPr sz="1500">
+                <a:solidFill>
+                  <a:srgbClr val="22282E"/>
+                </a:solidFill>
+              </a:rPr>
+              <a:t>•  Baja entropía en arranque — Bloquea hasta sembrar (getrandom) o añade fuente de hardware</a:t>
+            </a:r>
+          </a:p>
+          <a:p>
+            <a:pPr>
+              <a:spcAft>
+                <a:spcPts val="600"/>
+              </a:spcAft>
+            </a:pPr>
+            <a:r>
+              <a:rPr sz="1500">
+                <a:solidFill>
+                  <a:srgbClr val="22282E"/>
+                </a:solidFill>
+              </a:rPr>
+              <a:t>•  Reutilizar tokens de sesión — Genera uno nuevo por sesión con suficiente longitud</a:t>
+            </a:r>
+          </a:p>
+        </p:txBody>
+      </p:sp>
+    </p:spTree>
+  </p:cSld>
+  <p:clrMapOvr>
+    <a:masterClrMapping/>
+  </p:clrMapOvr>
+</p:sld>
+</file>
+
+<file path=ppt/slides/slide13.xml><?xml version="1.0" encoding="utf-8"?>
+<p:sld xmlns:a="http://schemas.openxmlformats.org/drawingml/2006/main" xmlns:p="http://schemas.openxmlformats.org/presentationml/2006/main" xmlns:r="http://schemas.openxmlformats.org/officeDocument/2006/relationships">
+  <p:cSld>
+    <p:spTree>
+      <p:nvGrpSpPr>
+        <p:cNvPr id="1" name=""/>
+        <p:cNvGrpSpPr/>
+        <p:nvPr/>
+      </p:nvGrpSpPr>
+      <p:grpSpPr/>
+      <p:sp>
+        <p:nvSpPr>
+          <p:cNvPr id="2" name="TextBox 1"/>
+          <p:cNvSpPr txBox="1"/>
+          <p:nvPr/>
+        </p:nvSpPr>
+        <p:spPr>
+          <a:xfrm>
+            <a:off x="457200" y="320040"/>
+            <a:ext cx="8229600" cy="822960"/>
+          </a:xfrm>
+          <a:prstGeom prst="rect">
+            <a:avLst/>
+          </a:prstGeom>
+          <a:noFill/>
+        </p:spPr>
+        <p:txBody>
+          <a:bodyPr wrap="square">
+            <a:spAutoFit/>
+          </a:bodyPr>
+          <a:lstStyle/>
+          <a:p>
+            <a:r>
+              <a:rPr sz="2600" b="1">
+                <a:solidFill>
+                  <a:srgbClr val="0B3D2E"/>
+                </a:solidFill>
+              </a:rPr>
+              <a:t>❓ Preguntas frecuentes</a:t>
+            </a:r>
+          </a:p>
+        </p:txBody>
+      </p:sp>
+      <p:sp>
+        <p:nvSpPr>
+          <p:cNvPr id="3" name="TextBox 2"/>
+          <p:cNvSpPr txBox="1"/>
+          <p:nvPr/>
+        </p:nvSpPr>
+        <p:spPr>
+          <a:xfrm>
+            <a:off x="457200" y="1280160"/>
+            <a:ext cx="8229600" cy="4937760"/>
+          </a:xfrm>
+          <a:prstGeom prst="rect">
+            <a:avLst/>
+          </a:prstGeom>
+          <a:noFill/>
+        </p:spPr>
+        <p:txBody>
+          <a:bodyPr wrap="square">
+            <a:spAutoFit/>
+          </a:bodyPr>
+          <a:lstStyle/>
+          <a:p>
+            <a:pPr>
+              <a:spcAft>
+                <a:spcPts val="600"/>
+              </a:spcAft>
+            </a:pPr>
+            <a:r>
+              <a:rPr sz="1500">
+                <a:solidFill>
+                  <a:srgbClr val="22282E"/>
+                </a:solidFill>
+              </a:rPr>
+              <a:t>•  ❓ ¿/dev/urandom o /dev/random?</a:t>
+            </a:r>
+          </a:p>
+          <a:p>
+            <a:pPr>
+              <a:spcAft>
+                <a:spcPts val="600"/>
+              </a:spcAft>
+            </a:pPr>
+            <a:r>
+              <a:rPr sz="1500">
+                <a:solidFill>
+                  <a:srgbClr val="22282E"/>
+                </a:solidFill>
+              </a:rPr>
+              <a:t>•  En Linux moderno, urandom/getrandom() es la elección correcta una vez sembrado; random puede bloquear innecesariamente.</a:t>
+            </a:r>
+          </a:p>
+          <a:p>
+            <a:pPr>
+              <a:spcAft>
+                <a:spcPts val="600"/>
+              </a:spcAft>
+            </a:pPr>
+            <a:r>
+              <a:rPr sz="1500">
+                <a:solidFill>
+                  <a:srgbClr val="22282E"/>
+                </a:solidFill>
+              </a:rPr>
+              <a:t>•  ❓ ¿Cuántos bits necesito para un token?</a:t>
+            </a:r>
+          </a:p>
+          <a:p>
+            <a:pPr>
+              <a:spcAft>
+                <a:spcPts val="600"/>
+              </a:spcAft>
+            </a:pPr>
+            <a:r>
+              <a:rPr sz="1500">
+                <a:solidFill>
+                  <a:srgbClr val="22282E"/>
+                </a:solidFill>
+              </a:rPr>
+              <a:t>•  Al menos 128 bits (16 bytes) de aleatoriedad real; 256 bits para márgenes amplios.</a:t>
+            </a:r>
+          </a:p>
+          <a:p>
+            <a:pPr>
+              <a:spcAft>
+                <a:spcPts val="600"/>
+              </a:spcAft>
+            </a:pPr>
+            <a:r>
+              <a:rPr sz="1500">
+                <a:solidFill>
+                  <a:srgbClr val="22282E"/>
+                </a:solidFill>
+              </a:rPr>
+              <a:t>•  ❓ ¿Por qué la mala aleatoriedad es tan peligrosa?</a:t>
+            </a:r>
+          </a:p>
+          <a:p>
+            <a:pPr>
+              <a:spcAft>
+                <a:spcPts val="600"/>
+              </a:spcAft>
+            </a:pPr>
+            <a:r>
+              <a:rPr sz="1500">
+                <a:solidFill>
+                  <a:srgbClr val="22282E"/>
+                </a:solidFill>
+              </a:rPr>
+              <a:t>•  Porque compromete claves y nonces de golpe; un CSPRNG débil hace inútil el mejor algoritmo.</a:t>
+            </a:r>
+          </a:p>
+        </p:txBody>
+      </p:sp>
+    </p:spTree>
+  </p:cSld>
+  <p:clrMapOvr>
+    <a:masterClrMapping/>
+  </p:clrMapOvr>
+</p:sld>
+</file>
+
+<file path=ppt/slides/slide14.xml><?xml version="1.0" encoding="utf-8"?>
+<p:sld xmlns:a="http://schemas.openxmlformats.org/drawingml/2006/main" xmlns:p="http://schemas.openxmlformats.org/presentationml/2006/main" xmlns:r="http://schemas.openxmlformats.org/officeDocument/2006/relationships">
+  <p:cSld>
+    <p:spTree>
+      <p:nvGrpSpPr>
+        <p:cNvPr id="1" name=""/>
+        <p:cNvGrpSpPr/>
+        <p:nvPr/>
+      </p:nvGrpSpPr>
+      <p:grpSpPr/>
+      <p:sp>
+        <p:nvSpPr>
+          <p:cNvPr id="2" name="TextBox 1"/>
+          <p:cNvSpPr txBox="1"/>
+          <p:nvPr/>
+        </p:nvSpPr>
+        <p:spPr>
+          <a:xfrm>
+            <a:off x="457200" y="320040"/>
+            <a:ext cx="8229600" cy="822960"/>
+          </a:xfrm>
+          <a:prstGeom prst="rect">
+            <a:avLst/>
+          </a:prstGeom>
+          <a:noFill/>
+        </p:spPr>
+        <p:txBody>
+          <a:bodyPr wrap="square">
+            <a:spAutoFit/>
+          </a:bodyPr>
+          <a:lstStyle/>
+          <a:p>
+            <a:r>
+              <a:rPr sz="2600" b="1">
+                <a:solidFill>
+                  <a:srgbClr val="0B3D2E"/>
+                </a:solidFill>
+              </a:rPr>
+              <a:t>🔗 Referencias</a:t>
+            </a:r>
+          </a:p>
+        </p:txBody>
+      </p:sp>
+      <p:sp>
+        <p:nvSpPr>
+          <p:cNvPr id="3" name="TextBox 2"/>
+          <p:cNvSpPr txBox="1"/>
+          <p:nvPr/>
+        </p:nvSpPr>
+        <p:spPr>
+          <a:xfrm>
+            <a:off x="457200" y="1280160"/>
+            <a:ext cx="8229600" cy="4937760"/>
+          </a:xfrm>
+          <a:prstGeom prst="rect">
+            <a:avLst/>
+          </a:prstGeom>
+          <a:noFill/>
+        </p:spPr>
+        <p:txBody>
+          <a:bodyPr wrap="square">
+            <a:spAutoFit/>
+          </a:bodyPr>
+          <a:lstStyle/>
+          <a:p>
+            <a:pPr>
+              <a:spcAft>
+                <a:spcPts val="600"/>
+              </a:spcAft>
+            </a:pPr>
+            <a:r>
+              <a:rPr sz="1500">
+                <a:solidFill>
+                  <a:srgbClr val="22282E"/>
+                </a:solidFill>
+              </a:rPr>
               <a:t>•  NIST SP 800-90A Rev.1 (DRBG) — &lt;https://csrc.nist.gov/publications/detail/sp/800-90a/rev-1/final&gt;</a:t>
             </a:r>
           </a:p>
@@ -3599,6 +3855,81 @@
           </a:p>
         </p:txBody>
       </p:sp>
+    </p:spTree>
+  </p:cSld>
+  <p:clrMapOvr>
+    <a:masterClrMapping/>
+  </p:clrMapOvr>
+</p:sld>
+</file>
+
+<file path=ppt/slides/slide15.xml><?xml version="1.0" encoding="utf-8"?>
+<p:sld xmlns:a="http://schemas.openxmlformats.org/drawingml/2006/main" xmlns:p="http://schemas.openxmlformats.org/presentationml/2006/main" xmlns:r="http://schemas.openxmlformats.org/officeDocument/2006/relationships">
+  <p:cSld>
+    <p:spTree>
+      <p:nvGrpSpPr>
+        <p:cNvPr id="1" name=""/>
+        <p:cNvGrpSpPr/>
+        <p:nvPr/>
+      </p:nvGrpSpPr>
+      <p:grpSpPr/>
+      <p:sp>
+        <p:nvSpPr>
+          <p:cNvPr id="2" name="TextBox 1"/>
+          <p:cNvSpPr txBox="1"/>
+          <p:nvPr/>
+        </p:nvSpPr>
+        <p:spPr>
+          <a:xfrm>
+            <a:off x="457200" y="274320"/>
+            <a:ext cx="8229600" cy="640080"/>
+          </a:xfrm>
+          <a:prstGeom prst="rect">
+            <a:avLst/>
+          </a:prstGeom>
+          <a:noFill/>
+        </p:spPr>
+        <p:txBody>
+          <a:bodyPr wrap="square">
+            <a:spAutoFit/>
+          </a:bodyPr>
+          <a:lstStyle/>
+          <a:p>
+            <a:r>
+              <a:rPr sz="2200" b="1">
+                <a:solidFill>
+                  <a:srgbClr val="0B3D2E"/>
+                </a:solidFill>
+              </a:rPr>
+              <a:t>Diagrama de la clase</a:t>
+            </a:r>
+          </a:p>
+        </p:txBody>
+      </p:sp>
+      <p:pic>
+        <p:nvPicPr>
+          <p:cNvPr id="3" name="Picture 2" descr="0e1e53bb73ea0d71.png"/>
+          <p:cNvPicPr>
+            <a:picLocks noChangeAspect="1"/>
+          </p:cNvPicPr>
+          <p:nvPr/>
+        </p:nvPicPr>
+        <p:blipFill>
+          <a:blip r:embed="rId2"/>
+          <a:stretch>
+            <a:fillRect/>
+          </a:stretch>
+        </p:blipFill>
+        <p:spPr>
+          <a:xfrm>
+            <a:off x="457200" y="1284732"/>
+            <a:ext cx="8229600" cy="4928616"/>
+          </a:xfrm>
+          <a:prstGeom prst="rect">
+            <a:avLst/>
+          </a:prstGeom>
+        </p:spPr>
+      </p:pic>
     </p:spTree>
   </p:cSld>
   <p:clrMapOvr>
@@ -3683,7 +4014,7 @@
                   <a:srgbClr val="22282E"/>
                 </a:solidFill>
               </a:rPr>
-              <a:t>•  Comprender por qué la aleatoriedad es el cimiento silencioso de toda la criptografía: claves, nonces, IVs, salts y tokens dependen de ella. El alumno aprenderá la diferencia entre un PRNG estadístico (predecible) y un CSPRNG (criptográficamente seguro), de dónde viene la entropía del sistema operativo, y por qué fallos de aleatoriedad han roto sistemas reales (Debian OpenSSL 2008, claves RSA con primos compartidos).</a:t>
+              <a:t>•  Comprender por qué la aleatoriedad es el cimiento silencioso de toda la criptografía: claves, nonces, IVs, salts y tokens dependen de ella. El alumno aprenderá la diferencia entre un PRNG estadístico…</a:t>
             </a:r>
           </a:p>
         </p:txBody>
@@ -4077,7 +4408,7 @@
                   <a:srgbClr val="0B3D2E"/>
                 </a:solidFill>
               </a:rPr>
-              <a:t>📖 Definiciones y características</a:t>
+              <a:t>🧠 Explicación en profundidad</a:t>
             </a:r>
           </a:p>
         </p:txBody>
@@ -4115,97 +4446,97 @@
                   <a:srgbClr val="22282E"/>
                 </a:solidFill>
               </a:rPr>
-              <a:t>•  Entropía: medida de imprevisibilidad. El SO la recolecta de eventos físicos (interrupciones, ruido de hardware).</a:t>
-            </a:r>
-          </a:p>
-          <a:p>
-            <a:pPr>
-              <a:spcAft>
-                <a:spcPts val="600"/>
-              </a:spcAft>
-            </a:pPr>
-            <a:r>
-              <a:rPr sz="1500">
-                <a:solidFill>
-                  <a:srgbClr val="22282E"/>
-                </a:solidFill>
-              </a:rPr>
-              <a:t>•  PRNG (estadístico): genera secuencias que "parecen" aleatorias pero son predecibles si conoces el estado/semilla (p. ej. Mersenne Twister). No para seguridad.</a:t>
-            </a:r>
-          </a:p>
-          <a:p>
-            <a:pPr>
-              <a:spcAft>
-                <a:spcPts val="600"/>
-              </a:spcAft>
-            </a:pPr>
-            <a:r>
-              <a:rPr sz="1500">
-                <a:solidFill>
-                  <a:srgbClr val="22282E"/>
-                </a:solidFill>
-              </a:rPr>
-              <a:t>•  CSPRNG: PRNG que, aun conociendo salidas previas, no permite predecir las siguientes ni recuperar el estado. Base de claves y nonces.</a:t>
-            </a:r>
-          </a:p>
-          <a:p>
-            <a:pPr>
-              <a:spcAft>
-                <a:spcPts val="600"/>
-              </a:spcAft>
-            </a:pPr>
-            <a:r>
-              <a:rPr sz="1500">
-                <a:solidFill>
-                  <a:srgbClr val="22282E"/>
-                </a:solidFill>
-              </a:rPr>
-              <a:t>•  DRBG: generador determinista por bits recomendado por NIST (HashDRBG, HMACDRBG, CTRDRBG); se re-siembra con entropía.</a:t>
-            </a:r>
-          </a:p>
-          <a:p>
-            <a:pPr>
-              <a:spcAft>
-                <a:spcPts val="600"/>
-              </a:spcAft>
-            </a:pPr>
-            <a:r>
-              <a:rPr sz="1500">
-                <a:solidFill>
-                  <a:srgbClr val="22282E"/>
-                </a:solidFill>
-              </a:rPr>
-              <a:t>•  getrandom() / /dev/urandom: interfaz del kernel que entrega bytes de un CSPRNG bien sembrado.</a:t>
-            </a:r>
-          </a:p>
-          <a:p>
-            <a:pPr>
-              <a:spcAft>
-                <a:spcPts val="600"/>
-              </a:spcAft>
-            </a:pPr>
-            <a:r>
-              <a:rPr sz="1500">
-                <a:solidFill>
-                  <a:srgbClr val="22282E"/>
-                </a:solidFill>
-              </a:rPr>
-              <a:t>•  Semilla (seed): valor inicial; si es predecible (p. ej. el tiempo), toda la salida lo es.</a:t>
-            </a:r>
-          </a:p>
-          <a:p>
-            <a:pPr>
-              <a:spcAft>
-                <a:spcPts val="600"/>
-              </a:spcAft>
-            </a:pPr>
-            <a:r>
-              <a:rPr sz="1500">
-                <a:solidFill>
-                  <a:srgbClr val="22282E"/>
-                </a:solidFill>
-              </a:rPr>
-              <a:t>•  Sesgo: desviación de la uniformidad; se detecta con pruebas estadísticas (Dieharder, NIST STS).</a:t>
+              <a:t>•  Cada clave, cada IV, cada nonce, cada salt, cada token de sesión y cada nonce de ECDSA</a:t>
+            </a:r>
+          </a:p>
+          <a:p>
+            <a:pPr>
+              <a:spcAft>
+                <a:spcPts val="600"/>
+              </a:spcAft>
+            </a:pPr>
+            <a:r>
+              <a:rPr sz="1500">
+                <a:solidFill>
+                  <a:srgbClr val="22282E"/>
+                </a:solidFill>
+              </a:rPr>
+              <a:t>•  sale de un generador de números aleatorios. Si ese generador es predecible, todo lo</a:t>
+            </a:r>
+          </a:p>
+          <a:p>
+            <a:pPr>
+              <a:spcAft>
+                <a:spcPts val="600"/>
+              </a:spcAft>
+            </a:pPr>
+            <a:r>
+              <a:rPr sz="1500">
+                <a:solidFill>
+                  <a:srgbClr val="22282E"/>
+                </a:solidFill>
+              </a:rPr>
+              <a:t>•  construido encima se derrumba por muy correcta que sea la criptografía: no hay que</a:t>
+            </a:r>
+          </a:p>
+          <a:p>
+            <a:pPr>
+              <a:spcAft>
+                <a:spcPts val="600"/>
+              </a:spcAft>
+            </a:pPr>
+            <a:r>
+              <a:rPr sz="1500">
+                <a:solidFill>
+                  <a:srgbClr val="22282E"/>
+                </a:solidFill>
+              </a:rPr>
+              <a:t>•  romper AES si se puede adivinar la clave. Es la dependencia menos visible de la parte y la</a:t>
+            </a:r>
+          </a:p>
+          <a:p>
+            <a:pPr>
+              <a:spcAft>
+                <a:spcPts val="600"/>
+              </a:spcAft>
+            </a:pPr>
+            <a:r>
+              <a:rPr sz="1500">
+                <a:solidFill>
+                  <a:srgbClr val="22282E"/>
+                </a:solidFill>
+              </a:rPr>
+              <a:t>•  que más desastres silenciosos ha causado.</a:t>
+            </a:r>
+          </a:p>
+          <a:p>
+            <a:pPr>
+              <a:spcAft>
+                <a:spcPts val="600"/>
+              </a:spcAft>
+            </a:pPr>
+            <a:r>
+              <a:rPr sz="1500">
+                <a:solidFill>
+                  <a:srgbClr val="22282E"/>
+                </a:solidFill>
+              </a:rPr>
+              <a:t>•  La distinción clave es entre PRNG y CSPRNG. Un PRNG estadístico —el random de</a:t>
+            </a:r>
+          </a:p>
+          <a:p>
+            <a:pPr>
+              <a:spcAft>
+                <a:spcPts val="600"/>
+              </a:spcAft>
+            </a:pPr>
+            <a:r>
+              <a:rPr sz="1500">
+                <a:solidFill>
+                  <a:srgbClr val="22282E"/>
+                </a:solidFill>
+              </a:rPr>
+              <a:t>•  cualquier lenguaje, un Mersenne Twister— produce números que parecen aleatorios y sirven</a:t>
             </a:r>
           </a:p>
         </p:txBody>
@@ -4256,7 +4587,7 @@
                   <a:srgbClr val="0B3D2E"/>
                 </a:solidFill>
               </a:rPr>
-              <a:t>🧰 Herramientas y preparación</a:t>
+              <a:t>📖 Definiciones y características</a:t>
             </a:r>
           </a:p>
         </p:txBody>
@@ -4294,37 +4625,97 @@
                   <a:srgbClr val="22282E"/>
                 </a:solidFill>
               </a:rPr>
-              <a:t>•  python3 -c "import secrets; print('ok')"</a:t>
-            </a:r>
-          </a:p>
-          <a:p>
-            <a:pPr>
-              <a:spcAft>
-                <a:spcPts val="600"/>
-              </a:spcAft>
-            </a:pPr>
-            <a:r>
-              <a:rPr sz="1500">
-                <a:solidFill>
-                  <a:srgbClr val="22282E"/>
-                </a:solidFill>
-              </a:rPr>
-              <a:t>•  which rngtest dieharder 2&gt;/dev/null || echo "opcional"</a:t>
-            </a:r>
-          </a:p>
-          <a:p>
-            <a:pPr>
-              <a:spcAft>
-                <a:spcPts val="600"/>
-              </a:spcAft>
-            </a:pPr>
-            <a:r>
-              <a:rPr sz="1500">
-                <a:solidFill>
-                  <a:srgbClr val="22282E"/>
-                </a:solidFill>
-              </a:rPr>
-              <a:t>•  Todo el trabajo es local y de análisis.</a:t>
+              <a:t>•  Entropía: medida de imprevisibilidad. El SO la recolecta de eventos físicos (interrupciones, ruido de hardware).</a:t>
+            </a:r>
+          </a:p>
+          <a:p>
+            <a:pPr>
+              <a:spcAft>
+                <a:spcPts val="600"/>
+              </a:spcAft>
+            </a:pPr>
+            <a:r>
+              <a:rPr sz="1500">
+                <a:solidFill>
+                  <a:srgbClr val="22282E"/>
+                </a:solidFill>
+              </a:rPr>
+              <a:t>•  PRNG (estadístico): genera secuencias que "parecen" aleatorias pero son predecibles si conoces el estado/semilla (p. ej. Mersenne Twister). No para seguridad.</a:t>
+            </a:r>
+          </a:p>
+          <a:p>
+            <a:pPr>
+              <a:spcAft>
+                <a:spcPts val="600"/>
+              </a:spcAft>
+            </a:pPr>
+            <a:r>
+              <a:rPr sz="1500">
+                <a:solidFill>
+                  <a:srgbClr val="22282E"/>
+                </a:solidFill>
+              </a:rPr>
+              <a:t>•  CSPRNG: PRNG que, aun conociendo salidas previas, no permite predecir las siguientes ni recuperar el estado. Base de claves y nonces.</a:t>
+            </a:r>
+          </a:p>
+          <a:p>
+            <a:pPr>
+              <a:spcAft>
+                <a:spcPts val="600"/>
+              </a:spcAft>
+            </a:pPr>
+            <a:r>
+              <a:rPr sz="1500">
+                <a:solidFill>
+                  <a:srgbClr val="22282E"/>
+                </a:solidFill>
+              </a:rPr>
+              <a:t>•  DRBG: generador determinista por bits recomendado por NIST (HashDRBG, HMACDRBG, CTRDRBG); se re-siembra con entropía.</a:t>
+            </a:r>
+          </a:p>
+          <a:p>
+            <a:pPr>
+              <a:spcAft>
+                <a:spcPts val="600"/>
+              </a:spcAft>
+            </a:pPr>
+            <a:r>
+              <a:rPr sz="1500">
+                <a:solidFill>
+                  <a:srgbClr val="22282E"/>
+                </a:solidFill>
+              </a:rPr>
+              <a:t>•  getrandom() / /dev/urandom: interfaz del kernel que entrega bytes de un CSPRNG bien sembrado.</a:t>
+            </a:r>
+          </a:p>
+          <a:p>
+            <a:pPr>
+              <a:spcAft>
+                <a:spcPts val="600"/>
+              </a:spcAft>
+            </a:pPr>
+            <a:r>
+              <a:rPr sz="1500">
+                <a:solidFill>
+                  <a:srgbClr val="22282E"/>
+                </a:solidFill>
+              </a:rPr>
+              <a:t>•  Semilla (seed): valor inicial; si es predecible (p. ej. el tiempo), toda la salida lo es.</a:t>
+            </a:r>
+          </a:p>
+          <a:p>
+            <a:pPr>
+              <a:spcAft>
+                <a:spcPts val="600"/>
+              </a:spcAft>
+            </a:pPr>
+            <a:r>
+              <a:rPr sz="1500">
+                <a:solidFill>
+                  <a:srgbClr val="22282E"/>
+                </a:solidFill>
+              </a:rPr>
+              <a:t>•  Sesgo: desviación de la uniformidad; se detecta con pruebas estadísticas (Dieharder, NIST STS).</a:t>
             </a:r>
           </a:p>
         </p:txBody>
@@ -4375,7 +4766,7 @@
                   <a:srgbClr val="0B3D2E"/>
                 </a:solidFill>
               </a:rPr>
-              <a:t>🧪 Laboratorio guiado</a:t>
+              <a:t>📔 Glosario</a:t>
             </a:r>
           </a:p>
         </p:txBody>
@@ -4413,97 +4804,97 @@
                   <a:srgbClr val="22282E"/>
                 </a:solidFill>
               </a:rPr>
-              <a:t>•  Genera material aleatorio seguro en Python:</a:t>
-            </a:r>
-          </a:p>
-          <a:p>
-            <a:pPr>
-              <a:spcAft>
-                <a:spcPts val="600"/>
-              </a:spcAft>
-            </a:pPr>
-            <a:r>
-              <a:rPr sz="1500">
-                <a:solidFill>
-                  <a:srgbClr val="22282E"/>
-                </a:solidFill>
-              </a:rPr>
-              <a:t>•  import os, secrets</a:t>
-            </a:r>
-          </a:p>
-          <a:p>
-            <a:pPr>
-              <a:spcAft>
-                <a:spcPts val="600"/>
-              </a:spcAft>
-            </a:pPr>
-            <a:r>
-              <a:rPr sz="1500">
-                <a:solidFill>
-                  <a:srgbClr val="22282E"/>
-                </a:solidFill>
-              </a:rPr>
-              <a:t>•  clave = os.urandom(32)             # 256 bits para AES</a:t>
-            </a:r>
-          </a:p>
-          <a:p>
-            <a:pPr>
-              <a:spcAft>
-                <a:spcPts val="600"/>
-              </a:spcAft>
-            </a:pPr>
-            <a:r>
-              <a:rPr sz="1500">
-                <a:solidFill>
-                  <a:srgbClr val="22282E"/>
-                </a:solidFill>
-              </a:rPr>
-              <a:t>•  nonce = os.urandom(12)             # nonce GCM</a:t>
-            </a:r>
-          </a:p>
-          <a:p>
-            <a:pPr>
-              <a:spcAft>
-                <a:spcPts val="600"/>
-              </a:spcAft>
-            </a:pPr>
-            <a:r>
-              <a:rPr sz="1500">
-                <a:solidFill>
-                  <a:srgbClr val="22282E"/>
-                </a:solidFill>
-              </a:rPr>
-              <a:t>•  token = secrets.tokenurlsafe(32)  # token de sesión</a:t>
-            </a:r>
-          </a:p>
-          <a:p>
-            <a:pPr>
-              <a:spcAft>
-                <a:spcPts val="600"/>
-              </a:spcAft>
-            </a:pPr>
-            <a:r>
-              <a:rPr sz="1500">
-                <a:solidFill>
-                  <a:srgbClr val="22282E"/>
-                </a:solidFill>
-              </a:rPr>
-              <a:t>•  print(clave.hex(), token)</a:t>
-            </a:r>
-          </a:p>
-          <a:p>
-            <a:pPr>
-              <a:spcAft>
-                <a:spcPts val="600"/>
-              </a:spcAft>
-            </a:pPr>
-            <a:r>
-              <a:rPr sz="1500">
-                <a:solidFill>
-                  <a:srgbClr val="22282E"/>
-                </a:solidFill>
-              </a:rPr>
-              <a:t>•  Contraejemplo predecible. Muestra que random.seed(tiempo) + random.getrandbits produce salidas reproducibles si el atacante conoce el instante; concluye que random no sirve para seguridad.</a:t>
+              <a:t>•  Término — Definición concisa</a:t>
+            </a:r>
+          </a:p>
+          <a:p>
+            <a:pPr>
+              <a:spcAft>
+                <a:spcPts val="600"/>
+              </a:spcAft>
+            </a:pPr>
+            <a:r>
+              <a:rPr sz="1500">
+                <a:solidFill>
+                  <a:srgbClr val="22282E"/>
+                </a:solidFill>
+              </a:rPr>
+              <a:t>•  Entropía — Medida de la incertidumbre real disponible como aleatoriedad</a:t>
+            </a:r>
+          </a:p>
+          <a:p>
+            <a:pPr>
+              <a:spcAft>
+                <a:spcPts val="600"/>
+              </a:spcAft>
+            </a:pPr>
+            <a:r>
+              <a:rPr sz="1500">
+                <a:solidFill>
+                  <a:srgbClr val="22282E"/>
+                </a:solidFill>
+              </a:rPr>
+              <a:t>•  PRNG — Generador determinista; parece aleatorio pero es predecible</a:t>
+            </a:r>
+          </a:p>
+          <a:p>
+            <a:pPr>
+              <a:spcAft>
+                <a:spcPts val="600"/>
+              </a:spcAft>
+            </a:pPr>
+            <a:r>
+              <a:rPr sz="1500">
+                <a:solidFill>
+                  <a:srgbClr val="22282E"/>
+                </a:solidFill>
+              </a:rPr>
+              <a:t>•  CSPRNG — Generador apto para criptografía: impredecible hacia delante</a:t>
+            </a:r>
+          </a:p>
+          <a:p>
+            <a:pPr>
+              <a:spcAft>
+                <a:spcPts val="600"/>
+              </a:spcAft>
+            </a:pPr>
+            <a:r>
+              <a:rPr sz="1500">
+                <a:solidFill>
+                  <a:srgbClr val="22282E"/>
+                </a:solidFill>
+              </a:rPr>
+              <a:t>•  Semilla (seed) — Valor inicial del generador; si es adivinable, todo lo es</a:t>
+            </a:r>
+          </a:p>
+          <a:p>
+            <a:pPr>
+              <a:spcAft>
+                <a:spcPts val="600"/>
+              </a:spcAft>
+            </a:pPr>
+            <a:r>
+              <a:rPr sz="1500">
+                <a:solidFill>
+                  <a:srgbClr val="22282E"/>
+                </a:solidFill>
+              </a:rPr>
+              <a:t>•  Estado interno — Datos del generador cuyo conocimiento predice las salidas</a:t>
+            </a:r>
+          </a:p>
+          <a:p>
+            <a:pPr>
+              <a:spcAft>
+                <a:spcPts val="600"/>
+              </a:spcAft>
+            </a:pPr>
+            <a:r>
+              <a:rPr sz="1500">
+                <a:solidFill>
+                  <a:srgbClr val="22282E"/>
+                </a:solidFill>
+              </a:rPr>
+              <a:t>•  Mersenne Twister — PRNG estadístico común; nunca para criptografía</a:t>
             </a:r>
           </a:p>
         </p:txBody>
@@ -4554,7 +4945,7 @@
                   <a:srgbClr val="0B3D2E"/>
                 </a:solidFill>
               </a:rPr>
-              <a:t>✍️ Ejercicios</a:t>
+              <a:t>🧰 Herramientas y preparación</a:t>
             </a:r>
           </a:p>
         </p:txBody>
@@ -4592,82 +4983,7 @@
                   <a:srgbClr val="22282E"/>
                 </a:solidFill>
               </a:rPr>
-              <a:t>•  Explica la diferencia entre random y secrets en Python.</a:t>
-            </a:r>
-          </a:p>
-          <a:p>
-            <a:pPr>
-              <a:spcAft>
-                <a:spcPts val="600"/>
-              </a:spcAft>
-            </a:pPr>
-            <a:r>
-              <a:rPr sz="1500">
-                <a:solidFill>
-                  <a:srgbClr val="22282E"/>
-                </a:solidFill>
-              </a:rPr>
-              <a:t>•  Genera un token de recuperación de 256 bits y razona su espacio.</a:t>
-            </a:r>
-          </a:p>
-          <a:p>
-            <a:pPr>
-              <a:spcAft>
-                <a:spcPts val="600"/>
-              </a:spcAft>
-            </a:pPr>
-            <a:r>
-              <a:rPr sz="1500">
-                <a:solidFill>
-                  <a:srgbClr val="22282E"/>
-                </a:solidFill>
-              </a:rPr>
-              <a:t>•  Investiga el incidente de claves RSA con primos compartidos (factorización por MCD).</a:t>
-            </a:r>
-          </a:p>
-          <a:p>
-            <a:pPr>
-              <a:spcAft>
-                <a:spcPts val="600"/>
-              </a:spcAft>
-            </a:pPr>
-            <a:r>
-              <a:rPr sz="1500">
-                <a:solidFill>
-                  <a:srgbClr val="22282E"/>
-                </a:solidFill>
-              </a:rPr>
-              <a:t>•  Describe cómo el kernel recolecta entropía en el arranque.</a:t>
-            </a:r>
-          </a:p>
-          <a:p>
-            <a:pPr>
-              <a:spcAft>
-                <a:spcPts val="600"/>
-              </a:spcAft>
-            </a:pPr>
-            <a:r>
-              <a:rPr sz="1500">
-                <a:solidFill>
-                  <a:srgbClr val="22282E"/>
-                </a:solidFill>
-              </a:rPr>
-              <a:t>•  Demuestra que sembrar con time() produce salidas predecibles.</a:t>
-            </a:r>
-          </a:p>
-          <a:p>
-            <a:pPr>
-              <a:spcAft>
-                <a:spcPts val="600"/>
-              </a:spcAft>
-            </a:pPr>
-            <a:r>
-              <a:rPr sz="1500">
-                <a:solidFill>
-                  <a:srgbClr val="22282E"/>
-                </a:solidFill>
-              </a:rPr>
-              <a:t>•  Corre una prueba estadística sobre dos fuentes y compara resultados.</a:t>
+              <a:t>•  Todo el trabajo es local y de análisis.</a:t>
             </a:r>
           </a:p>
         </p:txBody>
@@ -4718,7 +5034,7 @@
                   <a:srgbClr val="0B3D2E"/>
                 </a:solidFill>
               </a:rPr>
-              <a:t>📝 Reto verificable</a:t>
+              <a:t>🧪 Laboratorio guiado</a:t>
             </a:r>
           </a:p>
         </p:txBody>
@@ -4756,7 +5072,67 @@
                   <a:srgbClr val="22282E"/>
                 </a:solidFill>
               </a:rPr>
-              <a:t>•  Escribe una utilidad que genere claves, nonces y tokens exclusivamente con un CSPRNG, y un test que verifique ausencia de repeticiones en una gran muestra de nonces y una distribución de bits cercana a 50/50. Criterio de aceptación: la muestra no presenta nonces repetidos y la proporción de unos/ceros se desvía menos de un umbral razonable; el código no usa ningún PRNG estadístico.</a:t>
+              <a:t>•  Genera material aleatorio seguro en Python:</a:t>
+            </a:r>
+          </a:p>
+          <a:p>
+            <a:pPr>
+              <a:spcAft>
+                <a:spcPts val="600"/>
+              </a:spcAft>
+            </a:pPr>
+            <a:r>
+              <a:rPr sz="1500">
+                <a:solidFill>
+                  <a:srgbClr val="22282E"/>
+                </a:solidFill>
+              </a:rPr>
+              <a:t>•  Contraejemplo predecible. Muestra que random.seed(tiempo) + random.getrandbits produce salidas reproducibles si el atacante conoce el instante; concluye que random no sirve para seguridad.</a:t>
+            </a:r>
+          </a:p>
+          <a:p>
+            <a:pPr>
+              <a:spcAft>
+                <a:spcPts val="600"/>
+              </a:spcAft>
+            </a:pPr>
+            <a:r>
+              <a:rPr sz="1500">
+                <a:solidFill>
+                  <a:srgbClr val="22282E"/>
+                </a:solidFill>
+              </a:rPr>
+              <a:t>•  Analiza sesgos. Genera 1 MB con un CSPRNG y con un PRNG mal sembrado; corre pruebas estadísticas (o cuenta frecuencias de bits) y compara.</a:t>
+            </a:r>
+          </a:p>
+          <a:p>
+            <a:pPr>
+              <a:spcAft>
+                <a:spcPts val="600"/>
+              </a:spcAft>
+            </a:pPr>
+            <a:r>
+              <a:rPr sz="1500">
+                <a:solidFill>
+                  <a:srgbClr val="22282E"/>
+                </a:solidFill>
+              </a:rPr>
+              <a:t>•  Estudia el fallo Debian 2008. Investiga cómo un parche que redujo la entropía dejó el espacio de claves en apenas ~32.767 posibilidades y por qué hubo que regenerar millones de claves.</a:t>
+            </a:r>
+          </a:p>
+          <a:p>
+            <a:pPr>
+              <a:spcAft>
+                <a:spcPts val="600"/>
+              </a:spcAft>
+            </a:pPr>
+            <a:r>
+              <a:rPr sz="1500">
+                <a:solidFill>
+                  <a:srgbClr val="22282E"/>
+                </a:solidFill>
+              </a:rPr>
+              <a:t>•  Nonces únicos. Simula la generación de nonces para AES-GCM y verifica (con un conjunto) que no se repiten en el volumen esperado.</a:t>
             </a:r>
           </a:p>
         </p:txBody>
